--- a/task133/golden/arc_ecl_q3_2026.pptx
+++ b/task133/golden/arc_ecl_q3_2026.pptx
@@ -250,13 +250,13 @@
                   <c:v>0.005</c:v>
                 </c:pt>
                 <c:pt idx="1">
-                  <c:v>0.158</c:v>
+                  <c:v>0.159</c:v>
                 </c:pt>
                 <c:pt idx="2">
-                  <c:v>0.896</c:v>
+                  <c:v>0.94</c:v>
                 </c:pt>
                 <c:pt idx="3">
-                  <c:v>2.832</c:v>
+                  <c:v>2.779</c:v>
                 </c:pt>
               </c:numCache>
             </c:numRef>
@@ -370,7 +370,7 @@
                           <a:srgbClr val="1E2B3C"/>
                         </a:solidFill>
                       </a:rPr>
-                      <a:t>$5.7m</a:t>
+                      <a:t>$5.8m</a:t>
                     </a:r>
                   </a:p>
                 </c:rich>
@@ -417,16 +417,16 @@
                 <c:formatCode>General</c:formatCode>
                 <c:ptCount val="4"/>
                 <c:pt idx="0">
-                  <c:v>0.599</c:v>
+                  <c:v>0.641</c:v>
                 </c:pt>
                 <c:pt idx="1">
-                  <c:v>1.054</c:v>
+                  <c:v>1.073</c:v>
                 </c:pt>
                 <c:pt idx="2">
-                  <c:v>2.443</c:v>
+                  <c:v>2.412</c:v>
                 </c:pt>
                 <c:pt idx="3">
-                  <c:v>5.68</c:v>
+                  <c:v>5.763</c:v>
                 </c:pt>
               </c:numCache>
             </c:numRef>
@@ -3515,7 +3515,7 @@
                   <a:srgbClr val="1E2B3C"/>
                 </a:solidFill>
               </a:rPr>
-              <a:t>Book a collective ECL allowance of $13,667,000 on personal loans at 30 September 2026</a:t>
+              <a:t>Book a collective ECL allowance of $13,773,000 on personal loans at 30 September 2026</a:t>
             </a:r>
           </a:p>
           <a:p>
@@ -3525,7 +3525,7 @@
                   <a:srgbClr val="5B6670"/>
                 </a:solidFill>
               </a:rPr>
-              <a:t>Stage 1 $10,958,000, stage 2 $2,709,000; 363 loans in stage 3 sit outside the collective model</a:t>
+              <a:t>Stage 1 $10,933,000, stage 2 $2,840,000; 343 loans in stage 3 sit outside the collective model</a:t>
             </a:r>
           </a:p>
         </p:txBody>
@@ -3743,7 +3743,7 @@
                             <a:srgbClr val="1E2B3C"/>
                           </a:solidFill>
                         </a:rPr>
-                        <a:t>17,157</a:t>
+                        <a:t>17,109</a:t>
                       </a:r>
                     </a:p>
                   </a:txBody>
@@ -3765,7 +3765,7 @@
                             <a:srgbClr val="1E2B3C"/>
                           </a:solidFill>
                         </a:rPr>
-                        <a:t>$138,511,000</a:t>
+                        <a:t>$138,349,000</a:t>
                       </a:r>
                     </a:p>
                   </a:txBody>
@@ -3787,7 +3787,7 @@
                             <a:srgbClr val="1E2B3C"/>
                           </a:solidFill>
                         </a:rPr>
-                        <a:t>$3,217,000</a:t>
+                        <a:t>$3,202,000</a:t>
                       </a:r>
                     </a:p>
                   </a:txBody>
@@ -3809,7 +3809,7 @@
                             <a:srgbClr val="1E2B3C"/>
                           </a:solidFill>
                         </a:rPr>
-                        <a:t>2.32%</a:t>
+                        <a:t>2.31%</a:t>
                       </a:r>
                     </a:p>
                   </a:txBody>
@@ -3875,7 +3875,7 @@
                             <a:srgbClr val="1E2B3C"/>
                           </a:solidFill>
                         </a:rPr>
-                        <a:t>20,055</a:t>
+                        <a:t>20,180</a:t>
                       </a:r>
                     </a:p>
                   </a:txBody>
@@ -3897,7 +3897,7 @@
                             <a:srgbClr val="1E2B3C"/>
                           </a:solidFill>
                         </a:rPr>
-                        <a:t>$329,546,000</a:t>
+                        <a:t>$330,436,000</a:t>
                       </a:r>
                     </a:p>
                   </a:txBody>
@@ -3919,7 +3919,7 @@
                             <a:srgbClr val="1E2B3C"/>
                           </a:solidFill>
                         </a:rPr>
-                        <a:t>$7,740,000</a:t>
+                        <a:t>$7,731,000</a:t>
                       </a:r>
                     </a:p>
                   </a:txBody>
@@ -3941,7 +3941,7 @@
                             <a:srgbClr val="1E2B3C"/>
                           </a:solidFill>
                         </a:rPr>
-                        <a:t>2.35%</a:t>
+                        <a:t>2.34%</a:t>
                       </a:r>
                     </a:p>
                   </a:txBody>
@@ -4007,7 +4007,7 @@
                             <a:srgbClr val="1E2B3C"/>
                           </a:solidFill>
                         </a:rPr>
-                        <a:t>1,406</a:t>
+                        <a:t>1,421</a:t>
                       </a:r>
                     </a:p>
                   </a:txBody>
@@ -4029,7 +4029,7 @@
                             <a:srgbClr val="1E2B3C"/>
                           </a:solidFill>
                         </a:rPr>
-                        <a:t>$11,229,000</a:t>
+                        <a:t>$11,728,000</a:t>
                       </a:r>
                     </a:p>
                   </a:txBody>
@@ -4051,7 +4051,7 @@
                             <a:srgbClr val="1E2B3C"/>
                           </a:solidFill>
                         </a:rPr>
-                        <a:t>$673,000</a:t>
+                        <a:t>$681,000</a:t>
                       </a:r>
                     </a:p>
                   </a:txBody>
@@ -4073,7 +4073,7 @@
                             <a:srgbClr val="1E2B3C"/>
                           </a:solidFill>
                         </a:rPr>
-                        <a:t>5.99%</a:t>
+                        <a:t>5.81%</a:t>
                       </a:r>
                     </a:p>
                   </a:txBody>
@@ -4139,7 +4139,7 @@
                             <a:srgbClr val="1E2B3C"/>
                           </a:solidFill>
                         </a:rPr>
-                        <a:t>1,714</a:t>
+                        <a:t>1,844</a:t>
                       </a:r>
                     </a:p>
                   </a:txBody>
@@ -4161,7 +4161,7 @@
                             <a:srgbClr val="1E2B3C"/>
                           </a:solidFill>
                         </a:rPr>
-                        <a:t>$26,379,000</a:t>
+                        <a:t>$28,735,000</a:t>
                       </a:r>
                     </a:p>
                   </a:txBody>
@@ -4183,7 +4183,7 @@
                             <a:srgbClr val="1E2B3C"/>
                           </a:solidFill>
                         </a:rPr>
-                        <a:t>$2,036,000</a:t>
+                        <a:t>$2,159,000</a:t>
                       </a:r>
                     </a:p>
                   </a:txBody>
@@ -4205,7 +4205,7 @@
                             <a:srgbClr val="1E2B3C"/>
                           </a:solidFill>
                         </a:rPr>
-                        <a:t>7.72%</a:t>
+                        <a:t>7.51%</a:t>
                       </a:r>
                     </a:p>
                   </a:txBody>
@@ -4332,7 +4332,7 @@
                   <a:srgbClr val="1E2B3C"/>
                 </a:solidFill>
               </a:rPr>
-              <a:t>2026 PL60 lending carries the largest share of the allowance, $5,680,000</a:t>
+              <a:t>2026 PL60 lending carries the largest share of the allowance, $5,763,000</a:t>
             </a:r>
           </a:p>
           <a:p>
